--- a/Menu 24 by 36 on 6-26-24/2_DaBeast Services Menu.pptx
+++ b/Menu 24 by 36 on 6-26-24/2_DaBeast Services Menu.pptx
@@ -704,7 +704,7 @@
         </p:nvSpPr>
         <p:spPr>
           <a:xfrm>
-            <a:off x="2401334" y="1143000"/>
+            <a:off x="2401336" y="1143000"/>
             <a:ext cx="2055300" cy="3086100"/>
           </a:xfrm>
           <a:custGeom>
@@ -1463,7 +1463,7 @@
         </p:nvSpPr>
         <p:spPr>
           <a:xfrm>
-            <a:off x="2401334" y="1143000"/>
+            <a:off x="2401336" y="1143000"/>
             <a:ext cx="2055300" cy="3086100"/>
           </a:xfrm>
           <a:custGeom>
@@ -1940,7 +1940,7 @@
         <p:spPr>
           <a:xfrm>
             <a:off x="1508762" y="30510487"/>
-            <a:ext cx="4937700" cy="1752600"/>
+            <a:ext cx="4938300" cy="1752300"/>
           </a:xfrm>
           <a:prstGeom prst="rect">
             <a:avLst/>
@@ -2069,7 +2069,7 @@
         <p:spPr>
           <a:xfrm>
             <a:off x="7269482" y="30510487"/>
-            <a:ext cx="7406700" cy="1752600"/>
+            <a:ext cx="7406400" cy="1752300"/>
           </a:xfrm>
           <a:prstGeom prst="rect">
             <a:avLst/>
@@ -2198,7 +2198,7 @@
         <p:spPr>
           <a:xfrm>
             <a:off x="15499082" y="30510487"/>
-            <a:ext cx="4937700" cy="1752600"/>
+            <a:ext cx="4938300" cy="1752300"/>
           </a:xfrm>
           <a:prstGeom prst="rect">
             <a:avLst/>
@@ -2331,7 +2331,7 @@
         <p:spPr>
           <a:xfrm>
             <a:off x="1508762" y="1752606"/>
-            <a:ext cx="18928200" cy="6362700"/>
+            <a:ext cx="18928200" cy="6362400"/>
           </a:xfrm>
           <a:prstGeom prst="rect">
             <a:avLst/>
@@ -2649,7 +2649,7 @@
         <p:spPr>
           <a:xfrm>
             <a:off x="1508762" y="30510487"/>
-            <a:ext cx="4937700" cy="1752600"/>
+            <a:ext cx="4938300" cy="1752300"/>
           </a:xfrm>
           <a:prstGeom prst="rect">
             <a:avLst/>
@@ -2778,7 +2778,7 @@
         <p:spPr>
           <a:xfrm>
             <a:off x="7269482" y="30510487"/>
-            <a:ext cx="7406700" cy="1752600"/>
+            <a:ext cx="7406400" cy="1752300"/>
           </a:xfrm>
           <a:prstGeom prst="rect">
             <a:avLst/>
@@ -2907,7 +2907,7 @@
         <p:spPr>
           <a:xfrm>
             <a:off x="15499082" y="30510487"/>
-            <a:ext cx="4937700" cy="1752600"/>
+            <a:ext cx="4938300" cy="1752300"/>
           </a:xfrm>
           <a:prstGeom prst="rect">
             <a:avLst/>
@@ -3358,7 +3358,7 @@
         <p:spPr>
           <a:xfrm>
             <a:off x="1508762" y="30510487"/>
-            <a:ext cx="4937700" cy="1752600"/>
+            <a:ext cx="4938300" cy="1752300"/>
           </a:xfrm>
           <a:prstGeom prst="rect">
             <a:avLst/>
@@ -3487,7 +3487,7 @@
         <p:spPr>
           <a:xfrm>
             <a:off x="7269482" y="30510487"/>
-            <a:ext cx="7406700" cy="1752600"/>
+            <a:ext cx="7406400" cy="1752300"/>
           </a:xfrm>
           <a:prstGeom prst="rect">
             <a:avLst/>
@@ -3616,7 +3616,7 @@
         <p:spPr>
           <a:xfrm>
             <a:off x="15499082" y="30510487"/>
-            <a:ext cx="4937700" cy="1752600"/>
+            <a:ext cx="4938300" cy="1752300"/>
           </a:xfrm>
           <a:prstGeom prst="rect">
             <a:avLst/>
@@ -3749,7 +3749,7 @@
         <p:spPr>
           <a:xfrm>
             <a:off x="1508762" y="1752606"/>
-            <a:ext cx="18928200" cy="6362700"/>
+            <a:ext cx="18928200" cy="6362400"/>
           </a:xfrm>
           <a:prstGeom prst="rect">
             <a:avLst/>
@@ -4067,7 +4067,7 @@
         <p:spPr>
           <a:xfrm>
             <a:off x="1508762" y="30510487"/>
-            <a:ext cx="4937700" cy="1752600"/>
+            <a:ext cx="4938300" cy="1752300"/>
           </a:xfrm>
           <a:prstGeom prst="rect">
             <a:avLst/>
@@ -4196,7 +4196,7 @@
         <p:spPr>
           <a:xfrm>
             <a:off x="7269482" y="30510487"/>
-            <a:ext cx="7406700" cy="1752600"/>
+            <a:ext cx="7406400" cy="1752300"/>
           </a:xfrm>
           <a:prstGeom prst="rect">
             <a:avLst/>
@@ -4325,7 +4325,7 @@
         <p:spPr>
           <a:xfrm>
             <a:off x="15499082" y="30510487"/>
-            <a:ext cx="4937700" cy="1752600"/>
+            <a:ext cx="4938300" cy="1752300"/>
           </a:xfrm>
           <a:prstGeom prst="rect">
             <a:avLst/>
@@ -4458,7 +4458,7 @@
         <p:spPr>
           <a:xfrm>
             <a:off x="1497331" y="8206749"/>
-            <a:ext cx="18928200" cy="13693200"/>
+            <a:ext cx="18928200" cy="13692600"/>
           </a:xfrm>
           <a:prstGeom prst="rect">
             <a:avLst/>
@@ -4813,7 +4813,7 @@
         <p:spPr>
           <a:xfrm>
             <a:off x="1508762" y="30510487"/>
-            <a:ext cx="4937700" cy="1752600"/>
+            <a:ext cx="4938300" cy="1752300"/>
           </a:xfrm>
           <a:prstGeom prst="rect">
             <a:avLst/>
@@ -4942,7 +4942,7 @@
         <p:spPr>
           <a:xfrm>
             <a:off x="7269482" y="30510487"/>
-            <a:ext cx="7406700" cy="1752600"/>
+            <a:ext cx="7406400" cy="1752300"/>
           </a:xfrm>
           <a:prstGeom prst="rect">
             <a:avLst/>
@@ -5071,7 +5071,7 @@
         <p:spPr>
           <a:xfrm>
             <a:off x="15499082" y="30510487"/>
-            <a:ext cx="4937700" cy="1752600"/>
+            <a:ext cx="4938300" cy="1752300"/>
           </a:xfrm>
           <a:prstGeom prst="rect">
             <a:avLst/>
@@ -5204,7 +5204,7 @@
         <p:spPr>
           <a:xfrm>
             <a:off x="1508762" y="1752606"/>
-            <a:ext cx="18928200" cy="6362700"/>
+            <a:ext cx="18928200" cy="6362400"/>
           </a:xfrm>
           <a:prstGeom prst="rect">
             <a:avLst/>
@@ -5339,7 +5339,7 @@
         <p:spPr>
           <a:xfrm>
             <a:off x="1508762" y="8763001"/>
-            <a:ext cx="9327000" cy="20886300"/>
+            <a:ext cx="9327300" cy="20886300"/>
           </a:xfrm>
           <a:prstGeom prst="rect">
             <a:avLst/>
@@ -5522,7 +5522,7 @@
         <p:spPr>
           <a:xfrm>
             <a:off x="11109962" y="8763001"/>
-            <a:ext cx="9327000" cy="20886300"/>
+            <a:ext cx="9327300" cy="20886300"/>
           </a:xfrm>
           <a:prstGeom prst="rect">
             <a:avLst/>
@@ -5705,7 +5705,7 @@
         <p:spPr>
           <a:xfrm>
             <a:off x="1508762" y="30510487"/>
-            <a:ext cx="4937700" cy="1752600"/>
+            <a:ext cx="4938300" cy="1752300"/>
           </a:xfrm>
           <a:prstGeom prst="rect">
             <a:avLst/>
@@ -5834,7 +5834,7 @@
         <p:spPr>
           <a:xfrm>
             <a:off x="7269482" y="30510487"/>
-            <a:ext cx="7406700" cy="1752600"/>
+            <a:ext cx="7406400" cy="1752300"/>
           </a:xfrm>
           <a:prstGeom prst="rect">
             <a:avLst/>
@@ -5963,7 +5963,7 @@
         <p:spPr>
           <a:xfrm>
             <a:off x="15499082" y="30510487"/>
-            <a:ext cx="4937700" cy="1752600"/>
+            <a:ext cx="4938300" cy="1752300"/>
           </a:xfrm>
           <a:prstGeom prst="rect">
             <a:avLst/>
@@ -6096,7 +6096,7 @@
         <p:spPr>
           <a:xfrm>
             <a:off x="1511619" y="1752606"/>
-            <a:ext cx="18928200" cy="6362700"/>
+            <a:ext cx="18928200" cy="6362400"/>
           </a:xfrm>
           <a:prstGeom prst="rect">
             <a:avLst/>
@@ -6414,7 +6414,7 @@
         <p:spPr>
           <a:xfrm>
             <a:off x="1511619" y="12024360"/>
-            <a:ext cx="9284100" cy="17685900"/>
+            <a:ext cx="9284100" cy="17686500"/>
           </a:xfrm>
           <a:prstGeom prst="rect">
             <a:avLst/>
@@ -6597,7 +6597,7 @@
         <p:spPr>
           <a:xfrm>
             <a:off x="11109962" y="8069581"/>
-            <a:ext cx="9329700" cy="3954900"/>
+            <a:ext cx="9329400" cy="3954900"/>
           </a:xfrm>
           <a:prstGeom prst="rect">
             <a:avLst/>
@@ -6780,7 +6780,7 @@
         <p:spPr>
           <a:xfrm>
             <a:off x="11109962" y="12024360"/>
-            <a:ext cx="9329700" cy="17685900"/>
+            <a:ext cx="9329400" cy="17686500"/>
           </a:xfrm>
           <a:prstGeom prst="rect">
             <a:avLst/>
@@ -6963,7 +6963,7 @@
         <p:spPr>
           <a:xfrm>
             <a:off x="1508762" y="30510487"/>
-            <a:ext cx="4937700" cy="1752600"/>
+            <a:ext cx="4938300" cy="1752300"/>
           </a:xfrm>
           <a:prstGeom prst="rect">
             <a:avLst/>
@@ -7092,7 +7092,7 @@
         <p:spPr>
           <a:xfrm>
             <a:off x="7269482" y="30510487"/>
-            <a:ext cx="7406700" cy="1752600"/>
+            <a:ext cx="7406400" cy="1752300"/>
           </a:xfrm>
           <a:prstGeom prst="rect">
             <a:avLst/>
@@ -7221,7 +7221,7 @@
         <p:spPr>
           <a:xfrm>
             <a:off x="15499082" y="30510487"/>
-            <a:ext cx="4937700" cy="1752600"/>
+            <a:ext cx="4938300" cy="1752300"/>
           </a:xfrm>
           <a:prstGeom prst="rect">
             <a:avLst/>
@@ -7354,7 +7354,7 @@
         <p:spPr>
           <a:xfrm>
             <a:off x="1508762" y="1752606"/>
-            <a:ext cx="18928200" cy="6362700"/>
+            <a:ext cx="18928200" cy="6362400"/>
           </a:xfrm>
           <a:prstGeom prst="rect">
             <a:avLst/>
@@ -7489,7 +7489,7 @@
         <p:spPr>
           <a:xfrm>
             <a:off x="1508762" y="30510487"/>
-            <a:ext cx="4937700" cy="1752600"/>
+            <a:ext cx="4938300" cy="1752300"/>
           </a:xfrm>
           <a:prstGeom prst="rect">
             <a:avLst/>
@@ -7618,7 +7618,7 @@
         <p:spPr>
           <a:xfrm>
             <a:off x="7269482" y="30510487"/>
-            <a:ext cx="7406700" cy="1752600"/>
+            <a:ext cx="7406400" cy="1752300"/>
           </a:xfrm>
           <a:prstGeom prst="rect">
             <a:avLst/>
@@ -7747,7 +7747,7 @@
         <p:spPr>
           <a:xfrm>
             <a:off x="15499082" y="30510487"/>
-            <a:ext cx="4937700" cy="1752600"/>
+            <a:ext cx="4938300" cy="1752300"/>
           </a:xfrm>
           <a:prstGeom prst="rect">
             <a:avLst/>
@@ -7880,7 +7880,7 @@
         <p:spPr>
           <a:xfrm>
             <a:off x="1508762" y="30510487"/>
-            <a:ext cx="4937700" cy="1752600"/>
+            <a:ext cx="4938300" cy="1752300"/>
           </a:xfrm>
           <a:prstGeom prst="rect">
             <a:avLst/>
@@ -8009,7 +8009,7 @@
         <p:spPr>
           <a:xfrm>
             <a:off x="7269482" y="30510487"/>
-            <a:ext cx="7406700" cy="1752600"/>
+            <a:ext cx="7406400" cy="1752300"/>
           </a:xfrm>
           <a:prstGeom prst="rect">
             <a:avLst/>
@@ -8138,7 +8138,7 @@
         <p:spPr>
           <a:xfrm>
             <a:off x="15499082" y="30510487"/>
-            <a:ext cx="4937700" cy="1752600"/>
+            <a:ext cx="4938300" cy="1752300"/>
           </a:xfrm>
           <a:prstGeom prst="rect">
             <a:avLst/>
@@ -8271,7 +8271,7 @@
         <p:spPr>
           <a:xfrm>
             <a:off x="1511619" y="2194559"/>
-            <a:ext cx="7077900" cy="7680900"/>
+            <a:ext cx="7078200" cy="7680600"/>
           </a:xfrm>
           <a:prstGeom prst="rect">
             <a:avLst/>
@@ -8407,7 +8407,7 @@
         <p:spPr>
           <a:xfrm>
             <a:off x="9329738" y="4739646"/>
-            <a:ext cx="11109900" cy="23393400"/>
+            <a:ext cx="11110200" cy="23393700"/>
           </a:xfrm>
           <a:prstGeom prst="rect">
             <a:avLst/>
@@ -8590,7 +8590,7 @@
         <p:spPr>
           <a:xfrm>
             <a:off x="1511619" y="9875522"/>
-            <a:ext cx="7077900" cy="18295500"/>
+            <a:ext cx="7078200" cy="18295500"/>
           </a:xfrm>
           <a:prstGeom prst="rect">
             <a:avLst/>
@@ -8773,7 +8773,7 @@
         <p:spPr>
           <a:xfrm>
             <a:off x="1508762" y="30510487"/>
-            <a:ext cx="4937700" cy="1752600"/>
+            <a:ext cx="4938300" cy="1752300"/>
           </a:xfrm>
           <a:prstGeom prst="rect">
             <a:avLst/>
@@ -8902,7 +8902,7 @@
         <p:spPr>
           <a:xfrm>
             <a:off x="7269482" y="30510487"/>
-            <a:ext cx="7406700" cy="1752600"/>
+            <a:ext cx="7406400" cy="1752300"/>
           </a:xfrm>
           <a:prstGeom prst="rect">
             <a:avLst/>
@@ -9031,7 +9031,7 @@
         <p:spPr>
           <a:xfrm>
             <a:off x="15499082" y="30510487"/>
-            <a:ext cx="4937700" cy="1752600"/>
+            <a:ext cx="4938300" cy="1752300"/>
           </a:xfrm>
           <a:prstGeom prst="rect">
             <a:avLst/>
@@ -9164,7 +9164,7 @@
         <p:spPr>
           <a:xfrm>
             <a:off x="1511619" y="2194559"/>
-            <a:ext cx="7077900" cy="7680900"/>
+            <a:ext cx="7078200" cy="7680600"/>
           </a:xfrm>
           <a:prstGeom prst="rect">
             <a:avLst/>
@@ -9300,7 +9300,7 @@
         <p:spPr>
           <a:xfrm>
             <a:off x="9329738" y="4739646"/>
-            <a:ext cx="11109900" cy="23393400"/>
+            <a:ext cx="11110200" cy="23393700"/>
           </a:xfrm>
           <a:prstGeom prst="rect">
             <a:avLst/>
@@ -9322,7 +9322,7 @@
         <p:spPr>
           <a:xfrm>
             <a:off x="1511619" y="9875522"/>
-            <a:ext cx="7077900" cy="18295500"/>
+            <a:ext cx="7078200" cy="18295500"/>
           </a:xfrm>
           <a:prstGeom prst="rect">
             <a:avLst/>
@@ -9505,7 +9505,7 @@
         <p:spPr>
           <a:xfrm>
             <a:off x="1508762" y="30510487"/>
-            <a:ext cx="4937700" cy="1752600"/>
+            <a:ext cx="4938300" cy="1752300"/>
           </a:xfrm>
           <a:prstGeom prst="rect">
             <a:avLst/>
@@ -9634,7 +9634,7 @@
         <p:spPr>
           <a:xfrm>
             <a:off x="7269482" y="30510487"/>
-            <a:ext cx="7406700" cy="1752600"/>
+            <a:ext cx="7406400" cy="1752300"/>
           </a:xfrm>
           <a:prstGeom prst="rect">
             <a:avLst/>
@@ -9763,7 +9763,7 @@
         <p:spPr>
           <a:xfrm>
             <a:off x="15499082" y="30510487"/>
-            <a:ext cx="4937700" cy="1752600"/>
+            <a:ext cx="4938300" cy="1752300"/>
           </a:xfrm>
           <a:prstGeom prst="rect">
             <a:avLst/>
@@ -9903,7 +9903,7 @@
         <p:spPr>
           <a:xfrm>
             <a:off x="1508762" y="1752606"/>
-            <a:ext cx="18928200" cy="6362700"/>
+            <a:ext cx="18928200" cy="6362400"/>
           </a:xfrm>
           <a:prstGeom prst="rect">
             <a:avLst/>
@@ -10311,7 +10311,7 @@
         <p:spPr>
           <a:xfrm>
             <a:off x="1508762" y="30510487"/>
-            <a:ext cx="4937700" cy="1752600"/>
+            <a:ext cx="4938300" cy="1752300"/>
           </a:xfrm>
           <a:prstGeom prst="rect">
             <a:avLst/>
@@ -10512,7 +10512,7 @@
         <p:spPr>
           <a:xfrm>
             <a:off x="7269482" y="30510487"/>
-            <a:ext cx="7406700" cy="1752600"/>
+            <a:ext cx="7406400" cy="1752300"/>
           </a:xfrm>
           <a:prstGeom prst="rect">
             <a:avLst/>
@@ -10713,7 +10713,7 @@
         <p:spPr>
           <a:xfrm>
             <a:off x="15499082" y="30510487"/>
-            <a:ext cx="4937700" cy="1752600"/>
+            <a:ext cx="4938300" cy="1752300"/>
           </a:xfrm>
           <a:prstGeom prst="rect">
             <a:avLst/>
@@ -11617,7 +11617,7 @@
         <p:spPr>
           <a:xfrm>
             <a:off x="0" y="-326828"/>
-            <a:ext cx="21945600" cy="33526200"/>
+            <a:ext cx="21945600" cy="33526800"/>
           </a:xfrm>
           <a:prstGeom prst="rect">
             <a:avLst/>
@@ -11667,8 +11667,8 @@
         </p:nvSpPr>
         <p:spPr>
           <a:xfrm>
-            <a:off x="3" y="5297875"/>
-            <a:ext cx="21945600" cy="27066600"/>
+            <a:off x="0" y="5297875"/>
+            <a:ext cx="21945600" cy="27902100"/>
           </a:xfrm>
           <a:prstGeom prst="rect">
             <a:avLst/>
@@ -11719,7 +11719,7 @@
         <p:spPr>
           <a:xfrm>
             <a:off x="4721363" y="857002"/>
-            <a:ext cx="17097900" cy="1994700"/>
+            <a:ext cx="17097600" cy="1994700"/>
           </a:xfrm>
           <a:prstGeom prst="rect">
             <a:avLst/>
@@ -11776,7 +11776,7 @@
         <p:spPr>
           <a:xfrm>
             <a:off x="1138621" y="887749"/>
-            <a:ext cx="3582739" cy="3582743"/>
+            <a:ext cx="3582738" cy="3582743"/>
           </a:xfrm>
           <a:prstGeom prst="rect">
             <a:avLst/>
@@ -11795,8 +11795,8 @@
         </p:nvSpPr>
         <p:spPr>
           <a:xfrm>
-            <a:off x="2210480" y="7286466"/>
-            <a:ext cx="17454600" cy="10029300"/>
+            <a:off x="894849" y="7286475"/>
+            <a:ext cx="20085900" cy="10029300"/>
           </a:xfrm>
           <a:prstGeom prst="rect">
             <a:avLst/>
@@ -11891,7 +11891,7 @@
                 <a:cs typeface="Arial Narrow"/>
                 <a:sym typeface="Arial Narrow"/>
               </a:rPr>
-              <a:t>Cheeseburger ……………………………..</a:t>
+              <a:t>Cheeseburger </a:t>
             </a:r>
             <a:r>
               <a:rPr lang="en-US" sz="5900">
@@ -11903,7 +11903,7 @@
                 <a:cs typeface="Arial Narrow"/>
                 <a:sym typeface="Arial Narrow"/>
               </a:rPr>
-              <a:t>................</a:t>
+              <a:t>……………………………….…..........................</a:t>
             </a:r>
             <a:r>
               <a:rPr lang="en-US" sz="5900">
@@ -11915,7 +11915,7 @@
                 <a:cs typeface="Arial Narrow"/>
                 <a:sym typeface="Arial Narrow"/>
               </a:rPr>
-              <a:t>  12</a:t>
+              <a:t> 12</a:t>
             </a:r>
             <a:endParaRPr sz="5900">
               <a:solidFill>
@@ -11952,7 +11952,7 @@
                 <a:cs typeface="Arial Narrow"/>
                 <a:sym typeface="Arial Narrow"/>
               </a:rPr>
-              <a:t>Beer Brat ………………………………</a:t>
+              <a:t>Beer Brat </a:t>
             </a:r>
             <a:r>
               <a:rPr lang="en-US" sz="5900">
@@ -11964,7 +11964,7 @@
                 <a:cs typeface="Arial Narrow"/>
                 <a:sym typeface="Arial Narrow"/>
               </a:rPr>
-              <a:t>........................</a:t>
+              <a:t>……………………………….......................................</a:t>
             </a:r>
             <a:r>
               <a:rPr lang="en-US" sz="5900">
@@ -12013,7 +12013,7 @@
                 <a:cs typeface="Arial Narrow"/>
                 <a:sym typeface="Arial Narrow"/>
               </a:rPr>
-              <a:t>Meal deal: Chips and drink ………………… </a:t>
+              <a:t>Meal deal: Chips and drink ……………………………. </a:t>
             </a:r>
             <a:r>
               <a:rPr lang="en-US" sz="5900">
@@ -12097,7 +12097,7 @@
                 <a:cs typeface="Arial Narrow"/>
                 <a:sym typeface="Arial Narrow"/>
               </a:rPr>
-              <a:t>.......................</a:t>
+              <a:t>.....................................</a:t>
             </a:r>
             <a:r>
               <a:rPr lang="en-US" sz="5900">
@@ -12210,8 +12210,8 @@
         </p:nvSpPr>
         <p:spPr>
           <a:xfrm>
-            <a:off x="953158" y="18458636"/>
-            <a:ext cx="9479100" cy="9891000"/>
+            <a:off x="953150" y="19068225"/>
+            <a:ext cx="9859200" cy="8074500"/>
           </a:xfrm>
           <a:prstGeom prst="rect">
             <a:avLst/>
@@ -12554,7 +12554,7 @@
         </p:nvCxnSpPr>
         <p:spPr>
           <a:xfrm>
-            <a:off x="497853" y="20791056"/>
+            <a:off x="497853" y="21400656"/>
             <a:ext cx="20755200" cy="0"/>
           </a:xfrm>
           <a:prstGeom prst="straightConnector1">
@@ -12580,8 +12580,8 @@
         </p:nvSpPr>
         <p:spPr>
           <a:xfrm>
-            <a:off x="11416931" y="18458623"/>
-            <a:ext cx="9859200" cy="10091100"/>
+            <a:off x="11416931" y="19068223"/>
+            <a:ext cx="9859200" cy="11707200"/>
           </a:xfrm>
           <a:prstGeom prst="rect">
             <a:avLst/>
@@ -12703,7 +12703,7 @@
                 <a:cs typeface="Arial Narrow"/>
                 <a:sym typeface="Arial Narrow"/>
               </a:rPr>
-              <a:t>Guanabana ……………….. </a:t>
+              <a:t>Guanabana ………………… </a:t>
             </a:r>
             <a:r>
               <a:rPr b="1" lang="en-US" sz="5900">
@@ -12720,27 +12720,20 @@
             <a:endParaRPr sz="4600"/>
           </a:p>
           <a:p>
-            <a:pPr indent="0" lvl="0" marL="0" marR="0" rtl="0" algn="l">
-              <a:spcBef>
-                <a:spcPts val="0"/>
-              </a:spcBef>
-              <a:spcAft>
-                <a:spcPts val="0"/>
-              </a:spcAft>
-              <a:buNone/>
+            <a:pPr indent="-1041400" lvl="1" marL="2984500" marR="0" rtl="0" algn="l">
+              <a:spcBef>
+                <a:spcPts val="0"/>
+              </a:spcBef>
+              <a:spcAft>
+                <a:spcPts val="0"/>
+              </a:spcAft>
+              <a:buClr>
+                <a:schemeClr val="lt1"/>
+              </a:buClr>
+              <a:buSzPts val="4600"/>
+              <a:buFont typeface="Arial Narrow"/>
+              <a:buChar char="○"/>
             </a:pPr>
-            <a:r>
-              <a:rPr lang="en-US" sz="5900">
-                <a:solidFill>
-                  <a:schemeClr val="lt1"/>
-                </a:solidFill>
-                <a:latin typeface="Arial Narrow"/>
-                <a:ea typeface="Arial Narrow"/>
-                <a:cs typeface="Arial Narrow"/>
-                <a:sym typeface="Arial Narrow"/>
-              </a:rPr>
-              <a:t>	</a:t>
-            </a:r>
             <a:r>
               <a:rPr i="1" lang="en-US" sz="4600">
                 <a:solidFill>
@@ -12751,30 +12744,7 @@
                 <a:cs typeface="Arial Narrow"/>
                 <a:sym typeface="Arial Narrow"/>
               </a:rPr>
-              <a:t>Creamy tart drink derived from </a:t>
-            </a:r>
-            <a:br>
-              <a:rPr i="1" lang="en-US" sz="4600">
-                <a:solidFill>
-                  <a:schemeClr val="lt1"/>
-                </a:solidFill>
-                <a:latin typeface="Arial Narrow"/>
-                <a:ea typeface="Arial Narrow"/>
-                <a:cs typeface="Arial Narrow"/>
-                <a:sym typeface="Arial Narrow"/>
-              </a:rPr>
-            </a:br>
-            <a:r>
-              <a:rPr i="1" lang="en-US" sz="4600">
-                <a:solidFill>
-                  <a:schemeClr val="lt1"/>
-                </a:solidFill>
-                <a:latin typeface="Arial Narrow"/>
-                <a:ea typeface="Arial Narrow"/>
-                <a:cs typeface="Arial Narrow"/>
-                <a:sym typeface="Arial Narrow"/>
-              </a:rPr>
-              <a:t>	indigenous fruit </a:t>
+              <a:t>Creamy tart drink derived from indigenous fruit </a:t>
             </a:r>
             <a:r>
               <a:rPr lang="en-US" sz="4600">
@@ -12788,9 +12758,20 @@
               </a:rPr>
               <a:t>☺</a:t>
             </a:r>
-            <a:endParaRPr sz="4600">
+            <a:br>
+              <a:rPr lang="en-US" sz="4600">
+                <a:solidFill>
+                  <a:schemeClr val="lt1"/>
+                </a:solidFill>
+                <a:latin typeface="Arial Narrow"/>
+                <a:ea typeface="Arial Narrow"/>
+                <a:cs typeface="Arial Narrow"/>
+                <a:sym typeface="Arial Narrow"/>
+              </a:rPr>
+            </a:br>
+            <a:endParaRPr sz="5900">
               <a:solidFill>
-                <a:schemeClr val="lt1"/>
+                <a:srgbClr val="8CD872"/>
               </a:solidFill>
               <a:latin typeface="Arial Narrow"/>
               <a:ea typeface="Arial Narrow"/>
@@ -12799,27 +12780,20 @@
             </a:endParaRPr>
           </a:p>
           <a:p>
-            <a:pPr indent="1498600" lvl="0" marL="0" marR="0" rtl="0" algn="l">
-              <a:spcBef>
-                <a:spcPts val="0"/>
-              </a:spcBef>
-              <a:spcAft>
-                <a:spcPts val="0"/>
-              </a:spcAft>
-              <a:buNone/>
+            <a:pPr indent="-933450" lvl="0" marL="927100" marR="0" rtl="0" algn="l">
+              <a:spcBef>
+                <a:spcPts val="0"/>
+              </a:spcBef>
+              <a:spcAft>
+                <a:spcPts val="0"/>
+              </a:spcAft>
+              <a:buClr>
+                <a:schemeClr val="lt1"/>
+              </a:buClr>
+              <a:buSzPts val="5900"/>
+              <a:buFont typeface="Arial"/>
+              <a:buChar char="•"/>
             </a:pPr>
-            <a:r>
-              <a:rPr b="1" lang="en-US" sz="5900">
-                <a:solidFill>
-                  <a:schemeClr val="lt1"/>
-                </a:solidFill>
-                <a:latin typeface="Arial Narrow"/>
-                <a:ea typeface="Arial Narrow"/>
-                <a:cs typeface="Arial Narrow"/>
-                <a:sym typeface="Arial Narrow"/>
-              </a:rPr>
-              <a:t>Tamarindo</a:t>
-            </a:r>
             <a:r>
               <a:rPr lang="en-US" sz="5900">
                 <a:solidFill>
@@ -12830,19 +12804,7 @@
                 <a:cs typeface="Arial Narrow"/>
                 <a:sym typeface="Arial Narrow"/>
               </a:rPr>
-              <a:t> ……………….</a:t>
-            </a:r>
-            <a:r>
-              <a:rPr b="1" lang="en-US" sz="5900">
-                <a:solidFill>
-                  <a:schemeClr val="lt1"/>
-                </a:solidFill>
-                <a:latin typeface="Arial Narrow"/>
-                <a:ea typeface="Arial Narrow"/>
-                <a:cs typeface="Arial Narrow"/>
-                <a:sym typeface="Arial Narrow"/>
-              </a:rPr>
-              <a:t> </a:t>
+              <a:t>Tamarindo ………………….. </a:t>
             </a:r>
             <a:r>
               <a:rPr b="1" lang="en-US" sz="5900">
@@ -12856,6 +12818,17 @@
               </a:rPr>
               <a:t>4</a:t>
             </a:r>
+            <a:br>
+              <a:rPr b="1" lang="en-US" sz="5900">
+                <a:solidFill>
+                  <a:srgbClr val="8CD872"/>
+                </a:solidFill>
+                <a:latin typeface="Arial Narrow"/>
+                <a:ea typeface="Arial Narrow"/>
+                <a:cs typeface="Arial Narrow"/>
+                <a:sym typeface="Arial Narrow"/>
+              </a:rPr>
+            </a:br>
             <a:endParaRPr sz="5900">
               <a:solidFill>
                 <a:srgbClr val="8CD872"/>
@@ -13004,8 +12977,8 @@
         </p:nvSpPr>
         <p:spPr>
           <a:xfrm>
-            <a:off x="2210445" y="30842742"/>
-            <a:ext cx="6249000" cy="1409700"/>
+            <a:off x="595237" y="30842762"/>
+            <a:ext cx="9479100" cy="1101900"/>
           </a:xfrm>
           <a:prstGeom prst="rect">
             <a:avLst/>
@@ -13021,7 +12994,7 @@
           </a:bodyPr>
           <a:lstStyle/>
           <a:p>
-            <a:pPr indent="0" lvl="0" marL="0" marR="0" rtl="0" algn="l">
+            <a:pPr indent="0" lvl="0" marL="0" marR="0" rtl="0" algn="ctr">
               <a:spcBef>
                 <a:spcPts val="0"/>
               </a:spcBef>
@@ -13031,10 +13004,13 @@
               <a:buNone/>
             </a:pPr>
             <a:r>
-              <a:rPr i="1" lang="en-US" sz="3600" u="sng">
+              <a:rPr i="1" lang="en-US" sz="5200">
                 <a:solidFill>
                   <a:schemeClr val="lt1"/>
                 </a:solidFill>
+                <a:uFill>
+                  <a:noFill/>
+                </a:uFill>
                 <a:latin typeface="Arial"/>
                 <a:ea typeface="Arial"/>
                 <a:cs typeface="Arial"/>
@@ -13049,7 +13025,7 @@
               </a:rPr>
               <a:t>https://dabeastservices.com</a:t>
             </a:r>
-            <a:endParaRPr i="1" sz="3600">
+            <a:endParaRPr i="1" sz="5200">
               <a:solidFill>
                 <a:schemeClr val="lt1"/>
               </a:solidFill>
@@ -13122,7 +13098,7 @@
 <file path=ppt/theme/theme1.xml><?xml version="1.0" encoding="utf-8"?>
 <a:theme xmlns:a="http://schemas.openxmlformats.org/drawingml/2006/main" xmlns:r="http://schemas.openxmlformats.org/officeDocument/2006/relationships" name="Office Theme">
   <a:themeElements>
-    <a:clrScheme name="Office Theme">
+    <a:clrScheme name="Office">
       <a:dk1>
         <a:srgbClr val="000000"/>
       </a:dk1>
@@ -13401,7 +13377,7 @@
 <file path=ppt/theme/theme2.xml><?xml version="1.0" encoding="utf-8"?>
 <a:theme xmlns:a="http://schemas.openxmlformats.org/drawingml/2006/main" xmlns:r="http://schemas.openxmlformats.org/officeDocument/2006/relationships" name="Office Theme">
   <a:themeElements>
-    <a:clrScheme name="Office">
+    <a:clrScheme name="Office Theme">
       <a:dk1>
         <a:srgbClr val="000000"/>
       </a:dk1>
